--- a/marketing/output/showcase/editable-chart.pptx
+++ b/marketing/output/showcase/editable-chart.pptx
@@ -1405,7 +1405,7 @@
         <p:spPr>
           <a:xfrm>
             <a:off x="533400" y="1924941"/>
-            <a:ext cx="6000750" cy="1100199"/>
+            <a:ext cx="5267325" cy="1100199"/>
           </a:xfrm>
           <a:prstGeom prst="rect">
             <a:avLst/>
@@ -1439,7 +1439,7 @@
                 <a:ea typeface="Inter Tight"/>
                 <a:cs typeface="Inter Tight"/>
               </a:rPr>
-              <a:t>Keep the story.</a:t>
+              <a:t>New numbers?</a:t>
             </a:r>
             <a:endParaRPr lang="en-US" sz="4680" dirty="0"/>
           </a:p>
@@ -1465,7 +1465,7 @@
                 <a:ea typeface="Inter Tight"/>
                 <a:cs typeface="Inter Tight"/>
               </a:rPr>
-              <a:t>Change the data.</a:t>
+              <a:t>Same chart.</a:t>
             </a:r>
             <a:endParaRPr lang="en-US" sz="4680" dirty="0"/>
           </a:p>
@@ -1498,7 +1498,7 @@
         <p:spPr>
           <a:xfrm>
             <a:off x="533400" y="6331148"/>
-            <a:ext cx="6286500" cy="191572"/>
+            <a:ext cx="6896100" cy="222052"/>
           </a:xfrm>
           <a:prstGeom prst="rect">
             <a:avLst/>
@@ -1526,7 +1526,7 @@
                 <a:ea typeface="Inter"/>
                 <a:cs typeface="Inter"/>
               </a:rPr>
-              <a:t>Illustrative workflow data · Native chart in PowerPoint · Made with Vixl</a:t>
+              <a:t>Illustrative workflow data · Opens as a real PowerPoint chart · Made with Vixl</a:t>
             </a:r>
             <a:endParaRPr lang="en-US" sz="1200" dirty="0"/>
           </a:p>
